--- a/assets/pptx/catalog-672.pptx
+++ b/assets/pptx/catalog-672.pptx
@@ -3320,7 +3320,7 @@
                 <a:ea typeface="Ebrima"/>
                 <a:cs typeface="Ebrima"/>
               </a:rPr>
-              <a:t>ሁሉ በእርሱ ሆነ ያልሆነውስ አንዳች የቱ ነው (2x)</a:t>
+              <a:t>ሁሉ በእርሱ ሆነ ያልሆነውስ አንዳች የቱ ነው 2x</a:t>
             </a:r>
           </a:p>
         </p:txBody>
@@ -3526,7 +3526,7 @@
                 <a:ea typeface="Ebrima"/>
                 <a:cs typeface="Ebrima"/>
               </a:rPr>
-              <a:t>አይ ጥበብ (4x)</a:t>
+              <a:t>አይ ጥበብ 4x</a:t>
             </a:r>
           </a:p>
         </p:txBody>
@@ -3611,7 +3611,7 @@
                 <a:ea typeface="Ebrima"/>
                 <a:cs typeface="Ebrima"/>
               </a:rPr>
-              <a:t>በእርግጥ የማመልከው አምላክ ዕውቅታም ነው (2x)</a:t>
+              <a:t>በእርግጥ የማመልከው አምላክ ዕውቅታም ነው 2x</a:t>
             </a:r>
           </a:p>
         </p:txBody>
@@ -3750,7 +3750,7 @@
                 <a:ea typeface="Ebrima"/>
                 <a:cs typeface="Ebrima"/>
               </a:rPr>
-              <a:t>ትልቅ ነው ያሰኛል የጌታ አቤት ዕውቀቱ (2x)</a:t>
+              <a:t>ትልቅ ነው ያሰኛል የጌታ አቤት ዕውቀቱ 2x</a:t>
             </a:r>
           </a:p>
         </p:txBody>
@@ -3956,7 +3956,7 @@
                 <a:ea typeface="Ebrima"/>
                 <a:cs typeface="Ebrima"/>
               </a:rPr>
-              <a:t>አይ ጥበብ (4x)</a:t>
+              <a:t>አይ ጥበብ 4x</a:t>
             </a:r>
           </a:p>
         </p:txBody>
@@ -4041,7 +4041,7 @@
                 <a:ea typeface="Ebrima"/>
                 <a:cs typeface="Ebrima"/>
               </a:rPr>
-              <a:t>በእርግጥ የማመልከው አምላክ ዕውቅታም ነው (2x)</a:t>
+              <a:t>በእርግጥ የማመልከው አምላክ ዕውቅታም ነው 2x</a:t>
             </a:r>
           </a:p>
         </p:txBody>
